--- a/NextHikes IT Solutions - Telecom Analytics.pptx
+++ b/NextHikes IT Solutions - Telecom Analytics.pptx
@@ -178,7 +178,7 @@
             <p14:sldId id="271"/>
           </p14:sldIdLst>
         </p14:section>
-        <p14:section name="Limitations" id="{E618481E-AF38-4172-A8D1-FE1B77229629}">
+        <p14:section name="Limitations, Conclusion &amp; Dashbaord" id="{E618481E-AF38-4172-A8D1-FE1B77229629}">
           <p14:sldIdLst>
             <p14:sldId id="272"/>
             <p14:sldId id="277"/>
@@ -196,7 +196,7 @@
 <file path=ppt/revisionInfo.xml><?xml version="1.0" encoding="utf-8"?>
 <p1510:revInfo xmlns:a="http://schemas.openxmlformats.org/drawingml/2006/main" xmlns:r="http://schemas.openxmlformats.org/officeDocument/2006/relationships" xmlns:p1510="http://schemas.microsoft.com/office/powerpoint/2015/10/main">
   <p1510:revLst>
-    <p1510:client id="{5C5F5AA4-D8D9-48F1-B332-163794DEE224}" v="44" dt="2026-04-10T19:28:09.936"/>
+    <p1510:client id="{5C5F5AA4-D8D9-48F1-B332-163794DEE224}" v="45" dt="2026-04-10T19:59:56.333"/>
   </p1510:revLst>
 </p1510:revInfo>
 </file>
@@ -206,7 +206,7 @@
   <pc:docChgLst>
     <pc:chgData name="parul srivastava" userId="a56b37f0866fee59" providerId="LiveId" clId="{6472C41C-EB63-487D-B01B-3B67E05C2277}"/>
     <pc:docChg chg="undo custSel addSld delSld modSld sldOrd addSection delSection modSection">
-      <pc:chgData name="parul srivastava" userId="a56b37f0866fee59" providerId="LiveId" clId="{6472C41C-EB63-487D-B01B-3B67E05C2277}" dt="2026-04-10T19:51:41.692" v="1336" actId="1076"/>
+      <pc:chgData name="parul srivastava" userId="a56b37f0866fee59" providerId="LiveId" clId="{6472C41C-EB63-487D-B01B-3B67E05C2277}" dt="2026-04-10T20:00:50.337" v="1372" actId="1076"/>
       <pc:docMkLst>
         <pc:docMk/>
       </pc:docMkLst>
@@ -935,12 +935,60 @@
           </ac:spMkLst>
         </pc:spChg>
       </pc:sldChg>
-      <pc:sldChg chg="ord">
-        <pc:chgData name="parul srivastava" userId="a56b37f0866fee59" providerId="LiveId" clId="{6472C41C-EB63-487D-B01B-3B67E05C2277}" dt="2026-04-10T19:22:09.528" v="1113"/>
+      <pc:sldChg chg="addSp delSp modSp mod ord">
+        <pc:chgData name="parul srivastava" userId="a56b37f0866fee59" providerId="LiveId" clId="{6472C41C-EB63-487D-B01B-3B67E05C2277}" dt="2026-04-10T20:00:50.337" v="1372" actId="1076"/>
         <pc:sldMkLst>
           <pc:docMk/>
           <pc:sldMk cId="1663516977" sldId="277"/>
         </pc:sldMkLst>
+        <pc:spChg chg="del">
+          <ac:chgData name="parul srivastava" userId="a56b37f0866fee59" providerId="LiveId" clId="{6472C41C-EB63-487D-B01B-3B67E05C2277}" dt="2026-04-10T19:58:10.290" v="1340" actId="478"/>
+          <ac:spMkLst>
+            <pc:docMk/>
+            <pc:sldMk cId="1663516977" sldId="277"/>
+            <ac:spMk id="3" creationId="{C56B1571-B0A7-C76D-C8CB-8F5514D50DF5}"/>
+          </ac:spMkLst>
+        </pc:spChg>
+        <pc:spChg chg="add del mod">
+          <ac:chgData name="parul srivastava" userId="a56b37f0866fee59" providerId="LiveId" clId="{6472C41C-EB63-487D-B01B-3B67E05C2277}" dt="2026-04-10T19:58:19.076" v="1343" actId="478"/>
+          <ac:spMkLst>
+            <pc:docMk/>
+            <pc:sldMk cId="1663516977" sldId="277"/>
+            <ac:spMk id="6" creationId="{01ABEB8E-8AE1-DE30-DCD2-2EC36430B0BD}"/>
+          </ac:spMkLst>
+        </pc:spChg>
+        <pc:spChg chg="add mod">
+          <ac:chgData name="parul srivastava" userId="a56b37f0866fee59" providerId="LiveId" clId="{6472C41C-EB63-487D-B01B-3B67E05C2277}" dt="2026-04-10T20:00:12.800" v="1369" actId="1076"/>
+          <ac:spMkLst>
+            <pc:docMk/>
+            <pc:sldMk cId="1663516977" sldId="277"/>
+            <ac:spMk id="9" creationId="{2B160E2B-C47E-7F11-A101-C74B81191FE2}"/>
+          </ac:spMkLst>
+        </pc:spChg>
+        <pc:spChg chg="add mod">
+          <ac:chgData name="parul srivastava" userId="a56b37f0866fee59" providerId="LiveId" clId="{6472C41C-EB63-487D-B01B-3B67E05C2277}" dt="2026-04-10T20:00:50.337" v="1372" actId="1076"/>
+          <ac:spMkLst>
+            <pc:docMk/>
+            <pc:sldMk cId="1663516977" sldId="277"/>
+            <ac:spMk id="11" creationId="{CCB145E5-7B24-AE48-DF35-47F9336A62A3}"/>
+          </ac:spMkLst>
+        </pc:spChg>
+        <pc:picChg chg="add del mod">
+          <ac:chgData name="parul srivastava" userId="a56b37f0866fee59" providerId="LiveId" clId="{6472C41C-EB63-487D-B01B-3B67E05C2277}" dt="2026-04-10T19:59:45.256" v="1353" actId="14100"/>
+          <ac:picMkLst>
+            <pc:docMk/>
+            <pc:sldMk cId="1663516977" sldId="277"/>
+            <ac:picMk id="4" creationId="{504251A5-26C5-9CEE-9817-BB0B441E0027}"/>
+          </ac:picMkLst>
+        </pc:picChg>
+        <pc:picChg chg="add del mod">
+          <ac:chgData name="parul srivastava" userId="a56b37f0866fee59" providerId="LiveId" clId="{6472C41C-EB63-487D-B01B-3B67E05C2277}" dt="2026-04-10T19:59:24.748" v="1349" actId="478"/>
+          <ac:picMkLst>
+            <pc:docMk/>
+            <pc:sldMk cId="1663516977" sldId="277"/>
+            <ac:picMk id="8" creationId="{F381BA50-8858-6F61-3F33-AE23CB740D3A}"/>
+          </ac:picMkLst>
+        </pc:picChg>
       </pc:sldChg>
       <pc:sldChg chg="addSp delSp modSp add mod">
         <pc:chgData name="parul srivastava" userId="a56b37f0866fee59" providerId="LiveId" clId="{6472C41C-EB63-487D-B01B-3B67E05C2277}" dt="2026-04-10T19:51:41.692" v="1336" actId="1076"/>
@@ -1166,7 +1214,7 @@
           <a:p>
             <a:fld id="{BCD8B880-950B-47ED-B622-050D47020C67}" type="datetimeFigureOut">
               <a:rPr lang="en-IN" smtClean="0"/>
-              <a:t>10-04-2026</a:t>
+              <a:t>11-04-2026</a:t>
             </a:fld>
             <a:endParaRPr lang="en-IN"/>
           </a:p>
@@ -1366,7 +1414,7 @@
           <a:p>
             <a:fld id="{BCD8B880-950B-47ED-B622-050D47020C67}" type="datetimeFigureOut">
               <a:rPr lang="en-IN" smtClean="0"/>
-              <a:t>10-04-2026</a:t>
+              <a:t>11-04-2026</a:t>
             </a:fld>
             <a:endParaRPr lang="en-IN"/>
           </a:p>
@@ -1576,7 +1624,7 @@
           <a:p>
             <a:fld id="{BCD8B880-950B-47ED-B622-050D47020C67}" type="datetimeFigureOut">
               <a:rPr lang="en-IN" smtClean="0"/>
-              <a:t>10-04-2026</a:t>
+              <a:t>11-04-2026</a:t>
             </a:fld>
             <a:endParaRPr lang="en-IN"/>
           </a:p>
@@ -1776,7 +1824,7 @@
           <a:p>
             <a:fld id="{BCD8B880-950B-47ED-B622-050D47020C67}" type="datetimeFigureOut">
               <a:rPr lang="en-IN" smtClean="0"/>
-              <a:t>10-04-2026</a:t>
+              <a:t>11-04-2026</a:t>
             </a:fld>
             <a:endParaRPr lang="en-IN"/>
           </a:p>
@@ -2052,7 +2100,7 @@
           <a:p>
             <a:fld id="{BCD8B880-950B-47ED-B622-050D47020C67}" type="datetimeFigureOut">
               <a:rPr lang="en-IN" smtClean="0"/>
-              <a:t>10-04-2026</a:t>
+              <a:t>11-04-2026</a:t>
             </a:fld>
             <a:endParaRPr lang="en-IN"/>
           </a:p>
@@ -2320,7 +2368,7 @@
           <a:p>
             <a:fld id="{BCD8B880-950B-47ED-B622-050D47020C67}" type="datetimeFigureOut">
               <a:rPr lang="en-IN" smtClean="0"/>
-              <a:t>10-04-2026</a:t>
+              <a:t>11-04-2026</a:t>
             </a:fld>
             <a:endParaRPr lang="en-IN"/>
           </a:p>
@@ -2735,7 +2783,7 @@
           <a:p>
             <a:fld id="{BCD8B880-950B-47ED-B622-050D47020C67}" type="datetimeFigureOut">
               <a:rPr lang="en-IN" smtClean="0"/>
-              <a:t>10-04-2026</a:t>
+              <a:t>11-04-2026</a:t>
             </a:fld>
             <a:endParaRPr lang="en-IN"/>
           </a:p>
@@ -2877,7 +2925,7 @@
           <a:p>
             <a:fld id="{BCD8B880-950B-47ED-B622-050D47020C67}" type="datetimeFigureOut">
               <a:rPr lang="en-IN" smtClean="0"/>
-              <a:t>10-04-2026</a:t>
+              <a:t>11-04-2026</a:t>
             </a:fld>
             <a:endParaRPr lang="en-IN"/>
           </a:p>
@@ -2990,7 +3038,7 @@
           <a:p>
             <a:fld id="{BCD8B880-950B-47ED-B622-050D47020C67}" type="datetimeFigureOut">
               <a:rPr lang="en-IN" smtClean="0"/>
-              <a:t>10-04-2026</a:t>
+              <a:t>11-04-2026</a:t>
             </a:fld>
             <a:endParaRPr lang="en-IN"/>
           </a:p>
@@ -3303,7 +3351,7 @@
           <a:p>
             <a:fld id="{BCD8B880-950B-47ED-B622-050D47020C67}" type="datetimeFigureOut">
               <a:rPr lang="en-IN" smtClean="0"/>
-              <a:t>10-04-2026</a:t>
+              <a:t>11-04-2026</a:t>
             </a:fld>
             <a:endParaRPr lang="en-IN"/>
           </a:p>
@@ -3592,7 +3640,7 @@
           <a:p>
             <a:fld id="{BCD8B880-950B-47ED-B622-050D47020C67}" type="datetimeFigureOut">
               <a:rPr lang="en-IN" smtClean="0"/>
-              <a:t>10-04-2026</a:t>
+              <a:t>11-04-2026</a:t>
             </a:fld>
             <a:endParaRPr lang="en-IN"/>
           </a:p>
@@ -3835,7 +3883,7 @@
           <a:p>
             <a:fld id="{BCD8B880-950B-47ED-B622-050D47020C67}" type="datetimeFigureOut">
               <a:rPr lang="en-IN" smtClean="0"/>
-              <a:t>10-04-2026</a:t>
+              <a:t>11-04-2026</a:t>
             </a:fld>
             <a:endParaRPr lang="en-IN"/>
           </a:p>
@@ -7039,36 +7087,85 @@
           <a:chExt cx="0" cy="0"/>
         </a:xfrm>
       </p:grpSpPr>
-      <p:sp>
-        <p:nvSpPr>
-          <p:cNvPr id="3" name="Subtitle 2">
-            <a:extLst>
-              <a:ext uri="{FF2B5EF4-FFF2-40B4-BE49-F238E27FC236}">
-                <a16:creationId xmlns:a16="http://schemas.microsoft.com/office/drawing/2014/main" id="{C56B1571-B0A7-C76D-C8CB-8F5514D50DF5}"/>
-              </a:ext>
-            </a:extLst>
-          </p:cNvPr>
-          <p:cNvSpPr>
-            <a:spLocks noGrp="1"/>
-          </p:cNvSpPr>
-          <p:nvPr>
-            <p:ph type="subTitle" idx="1"/>
-          </p:nvPr>
-        </p:nvSpPr>
+      <p:pic>
+        <p:nvPicPr>
+          <p:cNvPr id="4" name="Picture 3">
+            <a:extLst>
+              <a:ext uri="{FF2B5EF4-FFF2-40B4-BE49-F238E27FC236}">
+                <a16:creationId xmlns:a16="http://schemas.microsoft.com/office/drawing/2014/main" id="{504251A5-26C5-9CEE-9817-BB0B441E0027}"/>
+              </a:ext>
+            </a:extLst>
+          </p:cNvPr>
+          <p:cNvPicPr>
+            <a:picLocks noChangeAspect="1"/>
+          </p:cNvPicPr>
+          <p:nvPr/>
+        </p:nvPicPr>
+        <p:blipFill>
+          <a:blip r:embed="rId2"/>
+          <a:stretch>
+            <a:fillRect/>
+          </a:stretch>
+        </p:blipFill>
         <p:spPr>
           <a:xfrm>
-            <a:off x="1415846" y="4762245"/>
-            <a:ext cx="9144000" cy="1655762"/>
+            <a:off x="1" y="0"/>
+            <a:ext cx="12191999" cy="5225143"/>
           </a:xfrm>
+          <a:prstGeom prst="rect">
+            <a:avLst/>
+          </a:prstGeom>
         </p:spPr>
-        <p:txBody>
-          <a:bodyPr>
+      </p:pic>
+      <p:sp>
+        <p:nvSpPr>
+          <p:cNvPr id="9" name="Title 1">
+            <a:extLst>
+              <a:ext uri="{FF2B5EF4-FFF2-40B4-BE49-F238E27FC236}">
+                <a16:creationId xmlns:a16="http://schemas.microsoft.com/office/drawing/2014/main" id="{2B160E2B-C47E-7F11-A101-C74B81191FE2}"/>
+              </a:ext>
+            </a:extLst>
+          </p:cNvPr>
+          <p:cNvSpPr txBox="1">
+            <a:spLocks/>
+          </p:cNvSpPr>
+          <p:nvPr/>
+        </p:nvSpPr>
+        <p:spPr>
+          <a:xfrm>
+            <a:off x="838200" y="5412985"/>
+            <a:ext cx="10515600" cy="1325563"/>
+          </a:xfrm>
+          <a:prstGeom prst="rect">
+            <a:avLst/>
+          </a:prstGeom>
+        </p:spPr>
+        <p:txBody>
+          <a:bodyPr vert="horz" lIns="91440" tIns="45720" rIns="91440" bIns="45720" rtlCol="0" anchor="b">
             <a:normAutofit/>
           </a:bodyPr>
-          <a:lstStyle/>
-          <a:p>
-            <a:r>
-              <a:rPr lang="en-US" sz="5400" dirty="0">
+          <a:lstStyle>
+            <a:lvl1pPr algn="ctr" defTabSz="914400" rtl="0" eaLnBrk="1" latinLnBrk="0" hangingPunct="1">
+              <a:lnSpc>
+                <a:spcPct val="90000"/>
+              </a:lnSpc>
+              <a:spcBef>
+                <a:spcPct val="0"/>
+              </a:spcBef>
+              <a:buNone/>
+              <a:defRPr sz="6000" kern="1200">
+                <a:solidFill>
+                  <a:schemeClr val="tx1"/>
+                </a:solidFill>
+                <a:latin typeface="+mj-lt"/>
+                <a:ea typeface="+mj-ea"/>
+                <a:cs typeface="+mj-cs"/>
+              </a:defRPr>
+            </a:lvl1pPr>
+          </a:lstStyle>
+          <a:p>
+            <a:r>
+              <a:rPr lang="en-US" dirty="0">
                 <a:ln w="0"/>
                 <a:solidFill>
                   <a:schemeClr val="accent1"/>
@@ -7083,7 +7180,7 @@
               </a:rPr>
               <a:t>Thank You…</a:t>
             </a:r>
-            <a:endParaRPr lang="en-IN" sz="5400" dirty="0">
+            <a:endParaRPr lang="en-IN" dirty="0">
               <a:ln w="0"/>
               <a:solidFill>
                 <a:schemeClr val="accent1"/>
@@ -7096,6 +7193,44 @@
                 </a:outerShdw>
               </a:effectLst>
             </a:endParaRPr>
+          </a:p>
+        </p:txBody>
+      </p:sp>
+      <p:sp>
+        <p:nvSpPr>
+          <p:cNvPr id="11" name="TextBox 10">
+            <a:extLst>
+              <a:ext uri="{FF2B5EF4-FFF2-40B4-BE49-F238E27FC236}">
+                <a16:creationId xmlns:a16="http://schemas.microsoft.com/office/drawing/2014/main" id="{CCB145E5-7B24-AE48-DF35-47F9336A62A3}"/>
+              </a:ext>
+            </a:extLst>
+          </p:cNvPr>
+          <p:cNvSpPr txBox="1"/>
+          <p:nvPr/>
+        </p:nvSpPr>
+        <p:spPr>
+          <a:xfrm>
+            <a:off x="221602" y="5706434"/>
+            <a:ext cx="6097554" cy="369332"/>
+          </a:xfrm>
+          <a:prstGeom prst="rect">
+            <a:avLst/>
+          </a:prstGeom>
+          <a:noFill/>
+        </p:spPr>
+        <p:txBody>
+          <a:bodyPr wrap="square">
+            <a:spAutoFit/>
+          </a:bodyPr>
+          <a:lstStyle/>
+          <a:p>
+            <a:r>
+              <a:rPr lang="en-IN" dirty="0">
+                <a:hlinkClick r:id="rId3"/>
+              </a:rPr>
+              <a:t>Telecom Dashboard</a:t>
+            </a:r>
+            <a:endParaRPr lang="en-IN" dirty="0"/>
           </a:p>
         </p:txBody>
       </p:sp>
